--- a/docs/결과보고서_AI손주.pptx
+++ b/docs/결과보고서_AI손주.pptx
@@ -7276,7 +7276,8 @@
                 <a:latin typeface="나눔스퀘어OTF ExtraBold"/>
                 <a:ea typeface="나눔스퀘어OTF ExtraBold"/>
               </a:rPr>
-              <a:t>[AI 손주/ ] </a:t>
+              <a:t>AI 손주
+</a:t>
             </a:r>
             <a:r>
               <a:rPr b="0" lang="ko-KR" sz="6000" spc="-1" strike="noStrike">
@@ -7340,96 +7341,12 @@
               </a:tabLst>
             </a:pPr>
             <a:r>
-              <a:rPr b="0" lang="ko-KR" sz="2400" spc="-1" strike="noStrike">
-                <a:solidFill>
-                  <a:schemeClr val="dk1"/>
-                </a:solidFill>
+              <a:rPr sz="2400">
                 <a:latin typeface="나눔스퀘어OTF Bold"/>
-                <a:ea typeface="나눔스퀘어OTF Bold"/>
-              </a:rPr>
-              <a:t>팀원</a:t>
-            </a:r>
-            <a:r>
-              <a:rPr b="0" lang="en-US" sz="2400" spc="-1" strike="noStrike">
-                <a:solidFill>
-                  <a:schemeClr val="dk1"/>
-                </a:solidFill>
-                <a:latin typeface="나눔스퀘어OTF Bold"/>
-                <a:ea typeface="나눔스퀘어OTF Bold"/>
-              </a:rPr>
-              <a:t>1: [, </a:t>
-            </a:r>
-            <a:r>
-              <a:rPr b="0" lang="ko-KR" sz="2400" spc="-1" strike="noStrike">
-                <a:solidFill>
-                  <a:schemeClr val="dk1"/>
-                </a:solidFill>
-                <a:latin typeface="나눔스퀘어OTF Bold"/>
-                <a:ea typeface="나눔스퀘어OTF Bold"/>
-              </a:rPr>
-              <a:t>교</a:t>
-            </a:r>
-            <a:r>
-              <a:rPr b="0" lang="en-US" sz="2400" spc="-1" strike="noStrike">
-                <a:solidFill>
-                  <a:schemeClr val="dk1"/>
-                </a:solidFill>
-                <a:latin typeface="나눔스퀘어OTF Bold"/>
-                <a:ea typeface="나눔스퀘어OTF Bold"/>
-              </a:rPr>
-              <a:t>] (</a:t>
-            </a:r>
-            <a:r>
-              <a:rPr b="0" lang="ko-KR" sz="2400" spc="-1" strike="noStrike">
-                <a:solidFill>
-                  <a:schemeClr val="dk1"/>
-                </a:solidFill>
-                <a:latin typeface="나눔스퀘어OTF Bold"/>
-                <a:ea typeface="나눔스퀘어OTF Bold"/>
-              </a:rPr>
-              <a:t>대표신청자</a:t>
-            </a:r>
-            <a:r>
-              <a:rPr b="0" lang="en-US" sz="2400" spc="-1" strike="noStrike">
-                <a:solidFill>
-                  <a:schemeClr val="dk1"/>
-                </a:solidFill>
-                <a:latin typeface="나눔스퀘어OTF Bold"/>
-                <a:ea typeface="나눔스퀘어OTF Bold"/>
-              </a:rPr>
-              <a:t>)</a:t>
+              </a:rPr>
+              <a:t>참가자 [이름]  (1인 참가)</a:t>
             </a:r>
             <a:endParaRPr b="0" lang="en-US" sz="2400" spc="-1" strike="noStrike">
-              <a:solidFill>
-                <a:srgbClr val="000000"/>
-              </a:solidFill>
-              <a:latin typeface="Noto Sans KR"/>
-            </a:endParaRPr>
-          </a:p>
-          <a:p>
-            <a:pPr indent="0" defTabSz="914400">
-              <a:lnSpc>
-                <a:spcPct val="90000"/>
-              </a:lnSpc>
-              <a:spcBef>
-                <a:spcPts val="1001"/>
-              </a:spcBef>
-              <a:buNone/>
-              <a:tabLst>
-                <a:tab algn="l" pos="0"/>
-              </a:tabLst>
-            </a:pPr>
-            <a:r>
-              <a:rPr b="0" lang="en-US" sz="1300" spc="-1" strike="noStrike">
-                <a:solidFill>
-                  <a:schemeClr val="dk1"/>
-                </a:solidFill>
-                <a:latin typeface="나눔스퀘어"/>
-                <a:ea typeface="나눔스퀘어"/>
-              </a:rPr>
-              <a:t>.</a:t>
-            </a:r>
-            <a:endParaRPr b="0" lang="en-US" sz="1300" spc="-1" strike="noStrike">
               <a:solidFill>
                 <a:srgbClr val="000000"/>
               </a:solidFill>
@@ -8800,7 +8717,7 @@
                 <a:spcPts val="1001"/>
               </a:spcBef>
               <a:spcAft>
-                <a:spcPts val="800"/>
+                <a:spcPts val="600"/>
               </a:spcAft>
               <a:buNone/>
               <a:tabLst>
@@ -8808,13 +8725,13 @@
               </a:tabLst>
             </a:pPr>
             <a:r>
-              <a:rPr sz="1500" b="0">
-                <a:solidFill>
-                  <a:srgbClr val="222222"/>
-                </a:solidFill>
-                <a:latin typeface="맑은 고딕"/>
-              </a:rPr>
-              <a:t>팀원1 [이름]: (담당한 역할을 적어주세요 — 예: 기획·개발·디자인 총괄)</a:t>
+              <a:rPr sz="1400" b="1">
+                <a:solidFill>
+                  <a:srgbClr val="1B64DA"/>
+                </a:solidFill>
+                <a:latin typeface="맑은 고딕"/>
+              </a:rPr>
+              <a:t>1인 팀 — 기획부터 개발·디자인·AI 연동·배포까지 전 과정을 혼자 수행</a:t>
             </a:r>
             <a:endParaRPr b="0" lang="en-US" sz="1800" spc="-1" strike="noStrike">
               <a:solidFill>
@@ -8826,17 +8743,113 @@
           <a:p>
             <a:pPr>
               <a:spcAft>
-                <a:spcPts val="800"/>
+                <a:spcPts val="600"/>
               </a:spcAft>
             </a:pPr>
             <a:r>
-              <a:rPr sz="1500" b="0">
+              <a:rPr sz="1400" b="0">
                 <a:solidFill>
                   <a:srgbClr val="222222"/>
                 </a:solidFill>
                 <a:latin typeface="맑은 고딕"/>
               </a:rPr>
-              <a:t>※ 개인 참가 시에도 맡은 역할을 작성합니다.</a:t>
+              <a:t>• 기획: 고령층 디지털 소외 문제 정의, 핵심 기능 설계 (서류 해석·폰 배우기·사기 검사)</a:t>
+            </a:r>
+          </a:p>
+          <a:p>
+            <a:pPr>
+              <a:spcAft>
+                <a:spcPts val="600"/>
+              </a:spcAft>
+            </a:pPr>
+            <a:r>
+              <a:rPr sz="1400" b="0">
+                <a:solidFill>
+                  <a:srgbClr val="222222"/>
+                </a:solidFill>
+                <a:latin typeface="맑은 고딕"/>
+              </a:rPr>
+              <a:t>• 개발: HTML·CSS·JavaScript로 웹앱 구현, Google Gemini 멀티모달 AI 연동</a:t>
+            </a:r>
+          </a:p>
+          <a:p>
+            <a:pPr>
+              <a:spcAft>
+                <a:spcPts val="600"/>
+              </a:spcAft>
+            </a:pPr>
+            <a:r>
+              <a:rPr sz="1400" b="0">
+                <a:solidFill>
+                  <a:srgbClr val="222222"/>
+                </a:solidFill>
+                <a:latin typeface="맑은 고딕"/>
+              </a:rPr>
+              <a:t>• AI 기능: 문서 요약·독소조항 탐지, 화면 인식 좌표로 ‘여기를 누르세요’ 표시,</a:t>
+            </a:r>
+          </a:p>
+          <a:p>
+            <a:pPr>
+              <a:spcAft>
+                <a:spcPts val="600"/>
+              </a:spcAft>
+            </a:pPr>
+            <a:r>
+              <a:rPr sz="1400" b="0">
+                <a:solidFill>
+                  <a:srgbClr val="222222"/>
+                </a:solidFill>
+                <a:latin typeface="맑은 고딕"/>
+              </a:rPr>
+              <a:t>   가상 폰 위에서 AI가 튜토리얼을 직접 설계하는 연습 모드, 사기 문자 판별</a:t>
+            </a:r>
+          </a:p>
+          <a:p>
+            <a:pPr>
+              <a:spcAft>
+                <a:spcPts val="600"/>
+              </a:spcAft>
+            </a:pPr>
+            <a:r>
+              <a:rPr sz="1400" b="0">
+                <a:solidFill>
+                  <a:srgbClr val="222222"/>
+                </a:solidFill>
+                <a:latin typeface="맑은 고딕"/>
+              </a:rPr>
+              <a:t>• 접근성 디자인: 큰 글씨·큰 버튼·고대비, 음성 입력(STT)·음성 안내(TTS) 적용</a:t>
+            </a:r>
+          </a:p>
+          <a:p>
+            <a:pPr>
+              <a:spcAft>
+                <a:spcPts val="600"/>
+              </a:spcAft>
+            </a:pPr>
+            <a:r>
+              <a:rPr sz="1400" b="0">
+                <a:solidFill>
+                  <a:srgbClr val="222222"/>
+                </a:solidFill>
+                <a:latin typeface="맑은 고딕"/>
+              </a:rPr>
+              <a:t>• 안정화: 무료 사용량 초과 시 예비 모델(Gemma) 자동 전환, 오프라인 지원(PWA)</a:t>
+            </a:r>
+          </a:p>
+          <a:p>
+            <a:pPr>
+              <a:spcAft>
+                <a:spcPts val="600"/>
+              </a:spcAft>
+            </a:pPr>
+            <a:r>
+              <a:rPr sz="1400" b="0">
+                <a:solidFill>
+                  <a:srgbClr val="222222"/>
+                </a:solidFill>
+                <a:latin typeface="맑은 고딕"/>
+              </a:rPr>
+              <a:t>• 배포: GitHub Pages 배포 및 단일 실행 파일 제작, 결과보고서·소개영상 제작</a:t>
             </a:r>
           </a:p>
         </p:txBody>
